--- a/assets/pptx/catalog-512.pptx
+++ b/assets/pptx/catalog-512.pptx
@@ -3291,7 +3291,7 @@
                 <a:ea typeface="Ebrima"/>
                 <a:cs typeface="Ebrima"/>
               </a:rPr>
-              <a:t>ይሁንለት (4x)</a:t>
+              <a:t>ይሁንለት 4x</a:t>
             </a:r>
           </a:p>
         </p:txBody>
@@ -3376,7 +3376,7 @@
                 <a:ea typeface="Ebrima"/>
                 <a:cs typeface="Ebrima"/>
               </a:rPr>
-              <a:t>አምላካችንን አክብሩት (2x)</a:t>
+              <a:t>አምላካችንን አክብሩት 2x</a:t>
             </a:r>
           </a:p>
         </p:txBody>
@@ -3721,7 +3721,7 @@
                 <a:ea typeface="Ebrima"/>
                 <a:cs typeface="Ebrima"/>
               </a:rPr>
-              <a:t>ለዚህ ለእግዚአብሔር እሰግዳለሁ (3x)</a:t>
+              <a:t>ለዚህ ለእግዚአብሔር እሰግዳለሁ 3x</a:t>
             </a:r>
           </a:p>
           <a:p>
@@ -3739,7 +3739,7 @@
                 <a:ea typeface="Ebrima"/>
                 <a:cs typeface="Ebrima"/>
               </a:rPr>
-              <a:t>ለዚህ ለእግዚአብሔር እኖራለሁ (3x)</a:t>
+              <a:t>ለዚህ ለእግዚአብሔር እኖራለሁ 3x</a:t>
             </a:r>
           </a:p>
           <a:p>
@@ -3757,7 +3757,7 @@
                 <a:ea typeface="Ebrima"/>
                 <a:cs typeface="Ebrima"/>
               </a:rPr>
-              <a:t>ለዚህ ለእግዚአብሔር እግዛለሁ (3x)</a:t>
+              <a:t>ለዚህ ለእግዚአብሔር እግዛለሁ 3x</a:t>
             </a:r>
           </a:p>
         </p:txBody>
@@ -3963,7 +3963,7 @@
                 <a:ea typeface="Ebrima"/>
                 <a:cs typeface="Ebrima"/>
               </a:rPr>
-              <a:t>ከጸሎት የሚሻል ሌላ ሌላ ሌላ አለ ወይ (2x)</a:t>
+              <a:t>ከጸሎት የሚሻል ሌላ ሌላ ሌላ አለ ወይ 2x</a:t>
             </a:r>
           </a:p>
           <a:p>
@@ -3981,7 +3981,7 @@
                 <a:ea typeface="Ebrima"/>
                 <a:cs typeface="Ebrima"/>
               </a:rPr>
-              <a:t>ሌላ ሌላ አለ ወይ (4x)</a:t>
+              <a:t>ሌላ ሌላ አለ ወይ 4x</a:t>
             </a:r>
           </a:p>
         </p:txBody>
@@ -4066,7 +4066,7 @@
                 <a:ea typeface="Ebrima"/>
                 <a:cs typeface="Ebrima"/>
               </a:rPr>
-              <a:t>እርሱ ይበቃኛል በቃ (2x)</a:t>
+              <a:t>እርሱ ይበቃኛል በቃ 2x</a:t>
             </a:r>
           </a:p>
         </p:txBody>
@@ -4151,7 +4151,7 @@
                 <a:ea typeface="Ebrima"/>
                 <a:cs typeface="Ebrima"/>
               </a:rPr>
-              <a:t>ከእኔ አምላክ የሚሻል ሌላ ሌላ ሌላ አለ ወይ (2x)</a:t>
+              <a:t>ከእኔ አምላክ የሚሻል ሌላ ሌላ ሌላ አለ ወይ 2x</a:t>
             </a:r>
           </a:p>
         </p:txBody>
@@ -4218,7 +4218,7 @@
                 <a:ea typeface="Ebrima"/>
                 <a:cs typeface="Ebrima"/>
               </a:rPr>
-              <a:t>ሌላ ሌላ አለ ወይ (4x)</a:t>
+              <a:t>ሌላ ሌላ አለ ወይ 4x</a:t>
             </a:r>
           </a:p>
           <a:p>
@@ -4236,7 +4236,7 @@
                 <a:ea typeface="Ebrima"/>
                 <a:cs typeface="Ebrima"/>
               </a:rPr>
-              <a:t>ሌላ ሌላ አለ ወይ (4x)</a:t>
+              <a:t>ሌላ ሌላ አለ ወይ 4x</a:t>
             </a:r>
           </a:p>
         </p:txBody>
@@ -4303,7 +4303,7 @@
                 <a:ea typeface="Ebrima"/>
                 <a:cs typeface="Ebrima"/>
               </a:rPr>
-              <a:t>አለልኝ ጌታ አለልኝ (4x)</a:t>
+              <a:t>አለልኝ ጌታ አለልኝ 4x</a:t>
             </a:r>
           </a:p>
           <a:p>
@@ -4321,7 +4321,7 @@
                 <a:ea typeface="Ebrima"/>
                 <a:cs typeface="Ebrima"/>
               </a:rPr>
-              <a:t>ጌታ አለልኝ (3x)</a:t>
+              <a:t>ጌታ አለልኝ 3x</a:t>
             </a:r>
           </a:p>
         </p:txBody>
@@ -4406,7 +4406,7 @@
                 <a:ea typeface="Ebrima"/>
                 <a:cs typeface="Ebrima"/>
               </a:rPr>
-              <a:t>የነፍሴ ደስታ ነህ ደስታ ደስታ (2x)</a:t>
+              <a:t>የነፍሴ ደስታ ነህ ደስታ ደስታ 2x</a:t>
             </a:r>
           </a:p>
         </p:txBody>
@@ -4491,7 +4491,7 @@
                 <a:ea typeface="Ebrima"/>
                 <a:cs typeface="Ebrima"/>
               </a:rPr>
-              <a:t>ኢየሱስ ይባላል ነፍሴን ይመልሳል (2x)</a:t>
+              <a:t>ኢየሱስ ይባላል ነፍሴን ይመልሳል 2x</a:t>
             </a:r>
           </a:p>
           <a:p>
@@ -4527,7 +4527,7 @@
                 <a:ea typeface="Ebrima"/>
                 <a:cs typeface="Ebrima"/>
               </a:rPr>
-              <a:t>ኢየሱስ ይባላል ነፍሴን ይመልሳል (2x)</a:t>
+              <a:t>ኢየሱስ ይባላል ነፍሴን ይመልሳል 2x</a:t>
             </a:r>
           </a:p>
           <a:p>
@@ -4545,7 +4545,7 @@
                 <a:ea typeface="Ebrima"/>
                 <a:cs typeface="Ebrima"/>
               </a:rPr>
-              <a:t>ነፍሴን ይመልሳል (4x)</a:t>
+              <a:t>ነፍሴን ይመልሳል 4x</a:t>
             </a:r>
           </a:p>
         </p:txBody>
@@ -4612,7 +4612,7 @@
                 <a:ea typeface="Ebrima"/>
                 <a:cs typeface="Ebrima"/>
               </a:rPr>
-              <a:t>አለልኝ ጌታ አለልኝ (4x)</a:t>
+              <a:t>አለልኝ ጌታ አለልኝ 4x</a:t>
             </a:r>
           </a:p>
           <a:p>
@@ -4630,7 +4630,7 @@
                 <a:ea typeface="Ebrima"/>
                 <a:cs typeface="Ebrima"/>
               </a:rPr>
-              <a:t>ጌታ አለልኝ (4x)</a:t>
+              <a:t>ጌታ አለልኝ 4x</a:t>
             </a:r>
           </a:p>
         </p:txBody>
@@ -4733,7 +4733,7 @@
                 <a:ea typeface="Ebrima"/>
                 <a:cs typeface="Ebrima"/>
               </a:rPr>
-              <a:t>ለልዑልናህ (3x)</a:t>
+              <a:t>ለልዑልናህ 3x</a:t>
             </a:r>
           </a:p>
           <a:p>
@@ -4751,7 +4751,7 @@
                 <a:ea typeface="Ebrima"/>
                 <a:cs typeface="Ebrima"/>
               </a:rPr>
-              <a:t>ለልዑልናህ (3x)</a:t>
+              <a:t>ለልዑልናህ 3x</a:t>
             </a:r>
           </a:p>
         </p:txBody>
